--- a/docs/presentations/59617983_JIANG Yuchen.pptx
+++ b/docs/presentations/59617983_JIANG Yuchen.pptx
@@ -871,7 +871,7 @@
           <a:p>
             <a:fld id="{5BCAD085-E8A6-8845-BD4E-CB4CCA059FC4}" type="datetimeFigureOut">
               <a:rPr lang="en-US" smtClean="0"/>
-              <a:t>4/15/26</a:t>
+              <a:t>4/17/26</a:t>
             </a:fld>
             <a:endParaRPr lang="en-US"/>
           </a:p>
@@ -1039,7 +1039,7 @@
           <a:p>
             <a:fld id="{5BCAD085-E8A6-8845-BD4E-CB4CCA059FC4}" type="datetimeFigureOut">
               <a:rPr lang="en-US" smtClean="0"/>
-              <a:t>4/15/26</a:t>
+              <a:t>4/17/26</a:t>
             </a:fld>
             <a:endParaRPr lang="en-US"/>
           </a:p>
@@ -1217,7 +1217,7 @@
           <a:p>
             <a:fld id="{5BCAD085-E8A6-8845-BD4E-CB4CCA059FC4}" type="datetimeFigureOut">
               <a:rPr lang="en-US" smtClean="0"/>
-              <a:t>4/15/26</a:t>
+              <a:t>4/17/26</a:t>
             </a:fld>
             <a:endParaRPr lang="en-US"/>
           </a:p>
@@ -1385,7 +1385,7 @@
           <a:p>
             <a:fld id="{5BCAD085-E8A6-8845-BD4E-CB4CCA059FC4}" type="datetimeFigureOut">
               <a:rPr lang="en-US" smtClean="0"/>
-              <a:t>4/15/26</a:t>
+              <a:t>4/17/26</a:t>
             </a:fld>
             <a:endParaRPr lang="en-US"/>
           </a:p>
@@ -1630,7 +1630,7 @@
           <a:p>
             <a:fld id="{5BCAD085-E8A6-8845-BD4E-CB4CCA059FC4}" type="datetimeFigureOut">
               <a:rPr lang="en-US" smtClean="0"/>
-              <a:t>4/15/26</a:t>
+              <a:t>4/17/26</a:t>
             </a:fld>
             <a:endParaRPr lang="en-US"/>
           </a:p>
@@ -1915,7 +1915,7 @@
           <a:p>
             <a:fld id="{5BCAD085-E8A6-8845-BD4E-CB4CCA059FC4}" type="datetimeFigureOut">
               <a:rPr lang="en-US" smtClean="0"/>
-              <a:t>4/15/26</a:t>
+              <a:t>4/17/26</a:t>
             </a:fld>
             <a:endParaRPr lang="en-US"/>
           </a:p>
@@ -2334,7 +2334,7 @@
           <a:p>
             <a:fld id="{5BCAD085-E8A6-8845-BD4E-CB4CCA059FC4}" type="datetimeFigureOut">
               <a:rPr lang="en-US" smtClean="0"/>
-              <a:t>4/15/26</a:t>
+              <a:t>4/17/26</a:t>
             </a:fld>
             <a:endParaRPr lang="en-US"/>
           </a:p>
@@ -2451,7 +2451,7 @@
           <a:p>
             <a:fld id="{5BCAD085-E8A6-8845-BD4E-CB4CCA059FC4}" type="datetimeFigureOut">
               <a:rPr lang="en-US" smtClean="0"/>
-              <a:t>4/15/26</a:t>
+              <a:t>4/17/26</a:t>
             </a:fld>
             <a:endParaRPr lang="en-US"/>
           </a:p>
@@ -2546,7 +2546,7 @@
           <a:p>
             <a:fld id="{5BCAD085-E8A6-8845-BD4E-CB4CCA059FC4}" type="datetimeFigureOut">
               <a:rPr lang="en-US" smtClean="0"/>
-              <a:t>4/15/26</a:t>
+              <a:t>4/17/26</a:t>
             </a:fld>
             <a:endParaRPr lang="en-US"/>
           </a:p>
@@ -2821,7 +2821,7 @@
           <a:p>
             <a:fld id="{5BCAD085-E8A6-8845-BD4E-CB4CCA059FC4}" type="datetimeFigureOut">
               <a:rPr lang="en-US" smtClean="0"/>
-              <a:t>4/15/26</a:t>
+              <a:t>4/17/26</a:t>
             </a:fld>
             <a:endParaRPr lang="en-US"/>
           </a:p>
@@ -3073,7 +3073,7 @@
           <a:p>
             <a:fld id="{5BCAD085-E8A6-8845-BD4E-CB4CCA059FC4}" type="datetimeFigureOut">
               <a:rPr lang="en-US" smtClean="0"/>
-              <a:t>4/15/26</a:t>
+              <a:t>4/17/26</a:t>
             </a:fld>
             <a:endParaRPr lang="en-US"/>
           </a:p>
@@ -3284,7 +3284,7 @@
           <a:p>
             <a:fld id="{5BCAD085-E8A6-8845-BD4E-CB4CCA059FC4}" type="datetimeFigureOut">
               <a:rPr lang="en-US" smtClean="0"/>
-              <a:t>4/15/26</a:t>
+              <a:t>4/17/26</a:t>
             </a:fld>
             <a:endParaRPr lang="en-US"/>
           </a:p>
